--- a/presentation_soyad.pptx
+++ b/presentation_soyad.pptx
@@ -10,6 +10,7 @@
     <p:sldId id="258" r:id="rId9"/>
     <p:sldId id="259" r:id="rId10"/>
     <p:sldId id="260" r:id="rId11"/>
+    <p:sldId id="261" r:id="rId12"/>
   </p:sldIdLst>
   <p:sldSz cx="9144000" cy="6858000" type="screen4x3"/>
   <p:notesSz cx="6858000" cy="9144000"/>
@@ -3438,6 +3439,93 @@
             </a:pPr>
             <a:r>
               <a:t>GBM + multi özet</a:t>
+            </a:r>
+          </a:p>
+        </p:txBody>
+      </p:sp>
+    </p:spTree>
+  </p:cSld>
+  <p:clrMapOvr>
+    <a:masterClrMapping/>
+  </p:clrMapOvr>
+</p:sld>
+</file>
+
+<file path=ppt/slides/slide6.xml><?xml version="1.0" encoding="utf-8"?>
+<p:sld xmlns:a="http://schemas.openxmlformats.org/drawingml/2006/main" xmlns:p="http://schemas.openxmlformats.org/presentationml/2006/main" xmlns:r="http://schemas.openxmlformats.org/officeDocument/2006/relationships">
+  <p:cSld>
+    <p:spTree>
+      <p:nvGrpSpPr>
+        <p:cNvPr id="1" name=""/>
+        <p:cNvGrpSpPr/>
+        <p:nvPr/>
+      </p:nvGrpSpPr>
+      <p:grpSpPr/>
+      <p:sp>
+        <p:nvSpPr>
+          <p:cNvPr id="2" name="Title 1"/>
+          <p:cNvSpPr>
+            <a:spLocks noGrp="1"/>
+          </p:cNvSpPr>
+          <p:nvPr>
+            <p:ph type="title"/>
+          </p:nvPr>
+        </p:nvSpPr>
+        <p:spPr/>
+        <p:txBody>
+          <a:bodyPr/>
+          <a:lstStyle/>
+          <a:p>
+            <a:r>
+              <a:t>Tahminler (tüm hisseler)</a:t>
+            </a:r>
+          </a:p>
+        </p:txBody>
+      </p:sp>
+      <p:sp>
+        <p:nvSpPr>
+          <p:cNvPr id="3" name="Content Placeholder 2"/>
+          <p:cNvSpPr>
+            <a:spLocks noGrp="1"/>
+          </p:cNvSpPr>
+          <p:nvPr>
+            <p:ph idx="1"/>
+          </p:nvPr>
+        </p:nvSpPr>
+        <p:spPr/>
+        <p:txBody>
+          <a:bodyPr/>
+          <a:lstStyle/>
+          <a:p>
+            <a:pPr>
+              <a:defRPr sz="1800"/>
+            </a:pPr>
+            <a:r>
+              <a:t>Tahmin satırı (tüm hedef × olay): 12044</a:t>
+            </a:r>
+          </a:p>
+          <a:p>
+            <a:pPr>
+              <a:defRPr sz="1800"/>
+            </a:pPr>
+            <a:r>
+              <a:t>Excel: predictions_all + pred_rmse_by_ticker sayfaları</a:t>
+            </a:r>
+          </a:p>
+          <a:p>
+            <a:pPr>
+              <a:defRPr sz="1800"/>
+            </a:pPr>
+            <a:r>
+              <a:t>Özet: in-sample tahmin; genelleme için CV RMSE tablolarına bakın.</a:t>
+            </a:r>
+          </a:p>
+          <a:p>
+            <a:pPr>
+              <a:defRPr sz="1800"/>
+            </a:pPr>
+            <a:r>
+              <a:t>Yüksek linear RMSE (örnek): AMD/y_3m=0.3399, NVDA/y_3m=0.2752, MU/y_3m=0.2697</a:t>
             </a:r>
           </a:p>
         </p:txBody>

--- a/presentation_soyad.pptx
+++ b/presentation_soyad.pptx
@@ -3525,7 +3525,7 @@
               <a:defRPr sz="1800"/>
             </a:pPr>
             <a:r>
-              <a:t>Yüksek linear RMSE (örnek): AMD/y_3m=0.3399, NVDA/y_3m=0.2752, MU/y_3m=0.2697</a:t>
+              <a:t>Yüksek linear RMSE (örnek): AMD/y_3m=0.3370, NVDA/y_3m=0.2759, MU/y_3m=0.2679</a:t>
             </a:r>
           </a:p>
         </p:txBody>

--- a/presentation_soyad.pptx
+++ b/presentation_soyad.pptx
@@ -3352,6 +3352,14 @@
             </a:pPr>
             <a:r>
               <a:t>Linear: FS + Ridge/Lasso/ENet</a:t>
+            </a:r>
+          </a:p>
+          <a:p>
+            <a:pPr>
+              <a:defRPr sz="1800"/>
+            </a:pPr>
+            <a:r>
+              <a:t>LDA / QDA / Gaussian NB (zaman serisi CV, ROC-AUC)</a:t>
             </a:r>
           </a:p>
           <a:p>
